--- a/test_assets/benchmarks/chart_sample.pptx
+++ b/test_assets/benchmarks/chart_sample.pptx
@@ -31,7 +31,7 @@
             <c:strRef>
               <c:strCache>
                 <c:pt count="1">
-                  <c:v>Revenue ()</c:v>
+                  <c:v>Revenue ($M)</c:v>
                 </c:pt>
               </c:strCache>
             </c:strRef>
